--- a/images/entanglement-diagram/entanglement.pptx
+++ b/images/entanglement-diagram/entanglement.pptx
@@ -5,9 +5,14 @@
     <p:sldMasterId id="2147483648" r:id="rId1"/>
   </p:sldMasterIdLst>
   <p:sldIdLst>
-    <p:sldId id="256" r:id="rId2"/>
-    <p:sldId id="258" r:id="rId3"/>
-    <p:sldId id="259" r:id="rId4"/>
+    <p:sldId id="260" r:id="rId2"/>
+    <p:sldId id="256" r:id="rId3"/>
+    <p:sldId id="258" r:id="rId4"/>
+    <p:sldId id="261" r:id="rId5"/>
+    <p:sldId id="262" r:id="rId6"/>
+    <p:sldId id="263" r:id="rId7"/>
+    <p:sldId id="264" r:id="rId8"/>
+    <p:sldId id="265" r:id="rId9"/>
   </p:sldIdLst>
   <p:sldSz cx="12192000" cy="6858000"/>
   <p:notesSz cx="6858000" cy="9144000"/>
@@ -106,6 +111,11 @@
       </a:defRPr>
     </a:lvl9pPr>
   </p:defaultTextStyle>
+  <p:extLst>
+    <p:ext uri="{EFAFB233-063F-42B5-8137-9DF3F51BA10A}">
+      <p15:sldGuideLst xmlns:p15="http://schemas.microsoft.com/office/powerpoint/2012/main"/>
+    </p:ext>
+  </p:extLst>
 </p:presentation>
 </file>
 
@@ -256,7 +266,7 @@
           <a:p>
             <a:fld id="{2501807F-4839-7042-85F8-7E765409A7F2}" type="datetimeFigureOut">
               <a:rPr lang="en-US" smtClean="0"/>
-              <a:t>7/20/26</a:t>
+              <a:t>7/21/26</a:t>
             </a:fld>
             <a:endParaRPr lang="en-US"/>
           </a:p>
@@ -454,7 +464,7 @@
           <a:p>
             <a:fld id="{2501807F-4839-7042-85F8-7E765409A7F2}" type="datetimeFigureOut">
               <a:rPr lang="en-US" smtClean="0"/>
-              <a:t>7/20/26</a:t>
+              <a:t>7/21/26</a:t>
             </a:fld>
             <a:endParaRPr lang="en-US"/>
           </a:p>
@@ -662,7 +672,7 @@
           <a:p>
             <a:fld id="{2501807F-4839-7042-85F8-7E765409A7F2}" type="datetimeFigureOut">
               <a:rPr lang="en-US" smtClean="0"/>
-              <a:t>7/20/26</a:t>
+              <a:t>7/21/26</a:t>
             </a:fld>
             <a:endParaRPr lang="en-US"/>
           </a:p>
@@ -860,7 +870,7 @@
           <a:p>
             <a:fld id="{2501807F-4839-7042-85F8-7E765409A7F2}" type="datetimeFigureOut">
               <a:rPr lang="en-US" smtClean="0"/>
-              <a:t>7/20/26</a:t>
+              <a:t>7/21/26</a:t>
             </a:fld>
             <a:endParaRPr lang="en-US"/>
           </a:p>
@@ -1135,7 +1145,7 @@
           <a:p>
             <a:fld id="{2501807F-4839-7042-85F8-7E765409A7F2}" type="datetimeFigureOut">
               <a:rPr lang="en-US" smtClean="0"/>
-              <a:t>7/20/26</a:t>
+              <a:t>7/21/26</a:t>
             </a:fld>
             <a:endParaRPr lang="en-US"/>
           </a:p>
@@ -1400,7 +1410,7 @@
           <a:p>
             <a:fld id="{2501807F-4839-7042-85F8-7E765409A7F2}" type="datetimeFigureOut">
               <a:rPr lang="en-US" smtClean="0"/>
-              <a:t>7/20/26</a:t>
+              <a:t>7/21/26</a:t>
             </a:fld>
             <a:endParaRPr lang="en-US"/>
           </a:p>
@@ -1812,7 +1822,7 @@
           <a:p>
             <a:fld id="{2501807F-4839-7042-85F8-7E765409A7F2}" type="datetimeFigureOut">
               <a:rPr lang="en-US" smtClean="0"/>
-              <a:t>7/20/26</a:t>
+              <a:t>7/21/26</a:t>
             </a:fld>
             <a:endParaRPr lang="en-US"/>
           </a:p>
@@ -1953,7 +1963,7 @@
           <a:p>
             <a:fld id="{2501807F-4839-7042-85F8-7E765409A7F2}" type="datetimeFigureOut">
               <a:rPr lang="en-US" smtClean="0"/>
-              <a:t>7/20/26</a:t>
+              <a:t>7/21/26</a:t>
             </a:fld>
             <a:endParaRPr lang="en-US"/>
           </a:p>
@@ -2066,7 +2076,7 @@
           <a:p>
             <a:fld id="{2501807F-4839-7042-85F8-7E765409A7F2}" type="datetimeFigureOut">
               <a:rPr lang="en-US" smtClean="0"/>
-              <a:t>7/20/26</a:t>
+              <a:t>7/21/26</a:t>
             </a:fld>
             <a:endParaRPr lang="en-US"/>
           </a:p>
@@ -2377,7 +2387,7 @@
           <a:p>
             <a:fld id="{2501807F-4839-7042-85F8-7E765409A7F2}" type="datetimeFigureOut">
               <a:rPr lang="en-US" smtClean="0"/>
-              <a:t>7/20/26</a:t>
+              <a:t>7/21/26</a:t>
             </a:fld>
             <a:endParaRPr lang="en-US"/>
           </a:p>
@@ -2665,7 +2675,7 @@
           <a:p>
             <a:fld id="{2501807F-4839-7042-85F8-7E765409A7F2}" type="datetimeFigureOut">
               <a:rPr lang="en-US" smtClean="0"/>
-              <a:t>7/20/26</a:t>
+              <a:t>7/21/26</a:t>
             </a:fld>
             <a:endParaRPr lang="en-US"/>
           </a:p>
@@ -2906,7 +2916,7 @@
           <a:p>
             <a:fld id="{2501807F-4839-7042-85F8-7E765409A7F2}" type="datetimeFigureOut">
               <a:rPr lang="en-US" smtClean="0"/>
-              <a:t>7/20/26</a:t>
+              <a:t>7/21/26</a:t>
             </a:fld>
             <a:endParaRPr lang="en-US"/>
           </a:p>
@@ -3325,6 +3335,111 @@
       </p:grpSpPr>
       <p:sp>
         <p:nvSpPr>
+          <p:cNvPr id="2" name="Title 1">
+            <a:extLst>
+              <a:ext uri="{FF2B5EF4-FFF2-40B4-BE49-F238E27FC236}">
+                <a16:creationId xmlns:a16="http://schemas.microsoft.com/office/drawing/2014/main" id="{BCBE5ADF-F720-4E27-9340-0D398104B1F8}"/>
+              </a:ext>
+            </a:extLst>
+          </p:cNvPr>
+          <p:cNvSpPr>
+            <a:spLocks noGrp="1"/>
+          </p:cNvSpPr>
+          <p:nvPr>
+            <p:ph type="title"/>
+          </p:nvPr>
+        </p:nvSpPr>
+        <p:spPr/>
+        <p:txBody>
+          <a:bodyPr/>
+          <a:lstStyle/>
+          <a:p>
+            <a:r>
+              <a:rPr lang="en-US" dirty="0"/>
+              <a:t>The Unreasonable Effectiveness of Quarto</a:t>
+            </a:r>
+          </a:p>
+        </p:txBody>
+      </p:sp>
+      <p:sp>
+        <p:nvSpPr>
+          <p:cNvPr id="4" name="TextBox 3">
+            <a:extLst>
+              <a:ext uri="{FF2B5EF4-FFF2-40B4-BE49-F238E27FC236}">
+                <a16:creationId xmlns:a16="http://schemas.microsoft.com/office/drawing/2014/main" id="{855E733C-63EA-1C5F-CD62-6EFF387F7E56}"/>
+              </a:ext>
+            </a:extLst>
+          </p:cNvPr>
+          <p:cNvSpPr txBox="1"/>
+          <p:nvPr/>
+        </p:nvSpPr>
+        <p:spPr>
+          <a:xfrm>
+            <a:off x="838200" y="2020186"/>
+            <a:ext cx="7414081" cy="923330"/>
+          </a:xfrm>
+          <a:prstGeom prst="rect">
+            <a:avLst/>
+          </a:prstGeom>
+          <a:noFill/>
+        </p:spPr>
+        <p:txBody>
+          <a:bodyPr wrap="none" rtlCol="0">
+            <a:spAutoFit/>
+          </a:bodyPr>
+          <a:lstStyle/>
+          <a:p>
+            <a:r>
+              <a:rPr lang="en-US" dirty="0"/>
+              <a:t>Based on blog post:</a:t>
+            </a:r>
+          </a:p>
+          <a:p>
+            <a:r>
+              <a:rPr lang="en-US" dirty="0">
+                <a:hlinkClick r:id="rId2"/>
+              </a:rPr>
+              <a:t>https://www.jhelvy.com/blog/2026-05-12-quarto-optimal-claude-output/</a:t>
+            </a:r>
+            <a:endParaRPr lang="en-US" dirty="0"/>
+          </a:p>
+          <a:p>
+            <a:endParaRPr lang="en-US" dirty="0"/>
+          </a:p>
+        </p:txBody>
+      </p:sp>
+    </p:spTree>
+    <p:extLst>
+      <p:ext uri="{BB962C8B-B14F-4D97-AF65-F5344CB8AC3E}">
+        <p14:creationId xmlns:p14="http://schemas.microsoft.com/office/powerpoint/2010/main" val="1069410218"/>
+      </p:ext>
+    </p:extLst>
+  </p:cSld>
+  <p:clrMapOvr>
+    <a:masterClrMapping/>
+  </p:clrMapOvr>
+</p:sld>
+</file>
+
+<file path=ppt/slides/slide2.xml><?xml version="1.0" encoding="utf-8"?>
+<p:sld xmlns:a="http://schemas.openxmlformats.org/drawingml/2006/main" xmlns:r="http://schemas.openxmlformats.org/officeDocument/2006/relationships" xmlns:p="http://schemas.openxmlformats.org/presentationml/2006/main">
+  <p:cSld>
+    <p:spTree>
+      <p:nvGrpSpPr>
+        <p:cNvPr id="1" name=""/>
+        <p:cNvGrpSpPr/>
+        <p:nvPr/>
+      </p:nvGrpSpPr>
+      <p:grpSpPr>
+        <a:xfrm>
+          <a:off x="0" y="0"/>
+          <a:ext cx="0" cy="0"/>
+          <a:chOff x="0" y="0"/>
+          <a:chExt cx="0" cy="0"/>
+        </a:xfrm>
+      </p:grpSpPr>
+      <p:sp>
+        <p:nvSpPr>
           <p:cNvPr id="4" name="Rounded Rectangle 3">
             <a:extLst>
               <a:ext uri="{FF2B5EF4-FFF2-40B4-BE49-F238E27FC236}">
@@ -3337,7 +3452,7 @@
         </p:nvSpPr>
         <p:spPr>
           <a:xfrm>
-            <a:off x="776177" y="1815509"/>
+            <a:off x="776177" y="2687379"/>
             <a:ext cx="1169581" cy="927687"/>
           </a:xfrm>
           <a:prstGeom prst="roundRect">
@@ -3389,7 +3504,7 @@
         </p:nvSpPr>
         <p:spPr>
           <a:xfrm>
-            <a:off x="3437863" y="1815509"/>
+            <a:off x="3437863" y="2687379"/>
             <a:ext cx="1169581" cy="927687"/>
           </a:xfrm>
           <a:prstGeom prst="roundRect">
@@ -3441,7 +3556,7 @@
         </p:nvSpPr>
         <p:spPr>
           <a:xfrm>
-            <a:off x="8765805" y="1815510"/>
+            <a:off x="8765805" y="2687380"/>
             <a:ext cx="1792313" cy="927686"/>
           </a:xfrm>
           <a:prstGeom prst="snip2DiagRect">
@@ -3497,7 +3612,7 @@
         </p:nvSpPr>
         <p:spPr>
           <a:xfrm>
-            <a:off x="3437863" y="3644611"/>
+            <a:off x="3437863" y="4516481"/>
             <a:ext cx="1169581" cy="927688"/>
           </a:xfrm>
           <a:prstGeom prst="roundRect">
@@ -3548,7 +3663,7 @@
         </p:nvCxnSpPr>
         <p:spPr>
           <a:xfrm>
-            <a:off x="1945758" y="2279353"/>
+            <a:off x="1945758" y="3151223"/>
             <a:ext cx="1492105" cy="0"/>
           </a:xfrm>
           <a:prstGeom prst="straightConnector1">
@@ -3594,7 +3709,7 @@
         </p:nvCxnSpPr>
         <p:spPr>
           <a:xfrm>
-            <a:off x="4607444" y="2279353"/>
+            <a:off x="4607444" y="3151223"/>
             <a:ext cx="4158361" cy="0"/>
           </a:xfrm>
           <a:prstGeom prst="straightConnector1">
@@ -3640,7 +3755,7 @@
         </p:nvCxnSpPr>
         <p:spPr>
           <a:xfrm flipV="1">
-            <a:off x="4022654" y="2743196"/>
+            <a:off x="4022654" y="3615066"/>
             <a:ext cx="0" cy="901415"/>
           </a:xfrm>
           <a:prstGeom prst="straightConnector1">
@@ -3686,7 +3801,7 @@
         </p:nvCxnSpPr>
         <p:spPr>
           <a:xfrm rot="5400000">
-            <a:off x="5511465" y="-1407301"/>
+            <a:off x="5511465" y="-535431"/>
             <a:ext cx="12700" cy="8300994"/>
           </a:xfrm>
           <a:prstGeom prst="bentConnector3">
@@ -3730,7 +3845,7 @@
         </p:nvSpPr>
         <p:spPr>
           <a:xfrm>
-            <a:off x="2165597" y="1912827"/>
+            <a:off x="2165597" y="2784697"/>
             <a:ext cx="918265" cy="369332"/>
           </a:xfrm>
           <a:prstGeom prst="rect">
@@ -3766,7 +3881,7 @@
         </p:nvSpPr>
         <p:spPr>
           <a:xfrm>
-            <a:off x="6104119" y="1906846"/>
+            <a:off x="6104119" y="2778716"/>
             <a:ext cx="1218154" cy="369332"/>
           </a:xfrm>
           <a:prstGeom prst="rect">
@@ -3802,7 +3917,7 @@
         </p:nvSpPr>
         <p:spPr>
           <a:xfrm>
-            <a:off x="3721075" y="4897329"/>
+            <a:off x="3721075" y="5769199"/>
             <a:ext cx="3270447" cy="369332"/>
           </a:xfrm>
           <a:prstGeom prst="rect">
@@ -3820,6 +3935,60 @@
             <a:r>
               <a:rPr lang="en-US" dirty="0"/>
               <a:t>Review artifact, then re-prompt</a:t>
+            </a:r>
+          </a:p>
+        </p:txBody>
+      </p:sp>
+      <p:sp>
+        <p:nvSpPr>
+          <p:cNvPr id="2" name="Title 1">
+            <a:extLst>
+              <a:ext uri="{FF2B5EF4-FFF2-40B4-BE49-F238E27FC236}">
+                <a16:creationId xmlns:a16="http://schemas.microsoft.com/office/drawing/2014/main" id="{08CD2F3F-17D2-AAF6-0BDF-AD00EE83893A}"/>
+              </a:ext>
+            </a:extLst>
+          </p:cNvPr>
+          <p:cNvSpPr txBox="1">
+            <a:spLocks/>
+          </p:cNvSpPr>
+          <p:nvPr/>
+        </p:nvSpPr>
+        <p:spPr>
+          <a:xfrm>
+            <a:off x="838200" y="365125"/>
+            <a:ext cx="10515600" cy="1325563"/>
+          </a:xfrm>
+          <a:prstGeom prst="rect">
+            <a:avLst/>
+          </a:prstGeom>
+        </p:spPr>
+        <p:txBody>
+          <a:bodyPr vert="horz" lIns="91440" tIns="45720" rIns="91440" bIns="45720" rtlCol="0" anchor="b">
+            <a:normAutofit/>
+          </a:bodyPr>
+          <a:lstStyle>
+            <a:lvl1pPr algn="ctr" defTabSz="914400" rtl="0" eaLnBrk="1" latinLnBrk="0" hangingPunct="1">
+              <a:lnSpc>
+                <a:spcPct val="90000"/>
+              </a:lnSpc>
+              <a:spcBef>
+                <a:spcPct val="0"/>
+              </a:spcBef>
+              <a:buNone/>
+              <a:defRPr sz="6000" kern="1200">
+                <a:solidFill>
+                  <a:schemeClr val="tx1"/>
+                </a:solidFill>
+                <a:latin typeface="+mj-lt"/>
+                <a:ea typeface="+mj-ea"/>
+                <a:cs typeface="+mj-cs"/>
+              </a:defRPr>
+            </a:lvl1pPr>
+          </a:lstStyle>
+          <a:p>
+            <a:r>
+              <a:rPr lang="en-US" dirty="0"/>
+              <a:t>Typical Agentic Workflow</a:t>
             </a:r>
           </a:p>
         </p:txBody>
@@ -3837,7 +4006,7 @@
 </p:sld>
 </file>
 
-<file path=ppt/slides/slide2.xml><?xml version="1.0" encoding="utf-8"?>
+<file path=ppt/slides/slide3.xml><?xml version="1.0" encoding="utf-8"?>
 <p:sld xmlns:a="http://schemas.openxmlformats.org/drawingml/2006/main" xmlns:r="http://schemas.openxmlformats.org/officeDocument/2006/relationships" xmlns:p="http://schemas.openxmlformats.org/presentationml/2006/main">
   <p:cSld>
     <p:spTree>
@@ -3874,7 +4043,7 @@
         </p:nvSpPr>
         <p:spPr>
           <a:xfrm>
-            <a:off x="776177" y="1815509"/>
+            <a:off x="776177" y="2804338"/>
             <a:ext cx="1169581" cy="927687"/>
           </a:xfrm>
           <a:prstGeom prst="roundRect">
@@ -3926,7 +4095,7 @@
         </p:nvSpPr>
         <p:spPr>
           <a:xfrm>
-            <a:off x="3437863" y="1815509"/>
+            <a:off x="3437863" y="2804338"/>
             <a:ext cx="1169581" cy="927687"/>
           </a:xfrm>
           <a:prstGeom prst="roundRect">
@@ -3978,7 +4147,7 @@
         </p:nvSpPr>
         <p:spPr>
           <a:xfrm>
-            <a:off x="6095999" y="1815510"/>
+            <a:off x="6095999" y="2804339"/>
             <a:ext cx="1792313" cy="927686"/>
           </a:xfrm>
           <a:prstGeom prst="snip2DiagRect">
@@ -4042,7 +4211,7 @@
         </p:nvSpPr>
         <p:spPr>
           <a:xfrm>
-            <a:off x="3437863" y="3644611"/>
+            <a:off x="3437863" y="4633440"/>
             <a:ext cx="1169581" cy="927688"/>
           </a:xfrm>
           <a:prstGeom prst="roundRect">
@@ -4093,7 +4262,7 @@
         </p:nvCxnSpPr>
         <p:spPr>
           <a:xfrm>
-            <a:off x="1945758" y="2279353"/>
+            <a:off x="1945758" y="3268182"/>
             <a:ext cx="1492105" cy="0"/>
           </a:xfrm>
           <a:prstGeom prst="straightConnector1">
@@ -4139,7 +4308,7 @@
         </p:nvCxnSpPr>
         <p:spPr>
           <a:xfrm>
-            <a:off x="4607444" y="2279353"/>
+            <a:off x="4607444" y="3268182"/>
             <a:ext cx="1488555" cy="0"/>
           </a:xfrm>
           <a:prstGeom prst="straightConnector1">
@@ -4181,7 +4350,7 @@
         </p:nvSpPr>
         <p:spPr>
           <a:xfrm>
-            <a:off x="2165597" y="1912827"/>
+            <a:off x="2165597" y="2901656"/>
             <a:ext cx="918265" cy="369332"/>
           </a:xfrm>
           <a:prstGeom prst="rect">
@@ -4217,7 +4386,7 @@
         </p:nvSpPr>
         <p:spPr>
           <a:xfrm>
-            <a:off x="4649552" y="1906846"/>
+            <a:off x="4649552" y="2895675"/>
             <a:ext cx="1218154" cy="369332"/>
           </a:xfrm>
           <a:prstGeom prst="rect">
@@ -4257,7 +4426,7 @@
         </p:nvCxnSpPr>
         <p:spPr>
           <a:xfrm flipV="1">
-            <a:off x="4607444" y="2743196"/>
+            <a:off x="4607444" y="3732025"/>
             <a:ext cx="2384712" cy="1365259"/>
           </a:xfrm>
           <a:prstGeom prst="bentConnector2">
@@ -4299,7 +4468,7 @@
         </p:nvSpPr>
         <p:spPr>
           <a:xfrm>
-            <a:off x="9076661" y="1821860"/>
+            <a:off x="9076661" y="2810689"/>
             <a:ext cx="1169581" cy="927687"/>
           </a:xfrm>
           <a:prstGeom prst="roundRect">
@@ -4355,7 +4524,7 @@
         </p:nvCxnSpPr>
         <p:spPr>
           <a:xfrm>
-            <a:off x="7888312" y="2279353"/>
+            <a:off x="7888312" y="3268182"/>
             <a:ext cx="1188349" cy="6351"/>
           </a:xfrm>
           <a:prstGeom prst="straightConnector1">
@@ -4397,7 +4566,7 @@
         </p:nvSpPr>
         <p:spPr>
           <a:xfrm>
-            <a:off x="7976898" y="1906846"/>
+            <a:off x="7976898" y="2895675"/>
             <a:ext cx="1011175" cy="369332"/>
           </a:xfrm>
           <a:prstGeom prst="rect">
@@ -4415,6 +4584,64 @@
             <a:r>
               <a:rPr lang="en-US" dirty="0"/>
               <a:t>Renders</a:t>
+            </a:r>
+          </a:p>
+        </p:txBody>
+      </p:sp>
+      <p:sp>
+        <p:nvSpPr>
+          <p:cNvPr id="8" name="Title 1">
+            <a:extLst>
+              <a:ext uri="{FF2B5EF4-FFF2-40B4-BE49-F238E27FC236}">
+                <a16:creationId xmlns:a16="http://schemas.microsoft.com/office/drawing/2014/main" id="{3A25C02C-DF6E-0F9B-E8F6-28E2F0CC8DDA}"/>
+              </a:ext>
+            </a:extLst>
+          </p:cNvPr>
+          <p:cNvSpPr txBox="1">
+            <a:spLocks/>
+          </p:cNvSpPr>
+          <p:nvPr/>
+        </p:nvSpPr>
+        <p:spPr>
+          <a:xfrm>
+            <a:off x="838200" y="365125"/>
+            <a:ext cx="10515600" cy="1325563"/>
+          </a:xfrm>
+          <a:prstGeom prst="rect">
+            <a:avLst/>
+          </a:prstGeom>
+        </p:spPr>
+        <p:txBody>
+          <a:bodyPr vert="horz" lIns="91440" tIns="45720" rIns="91440" bIns="45720" rtlCol="0" anchor="b">
+            <a:normAutofit/>
+          </a:bodyPr>
+          <a:lstStyle>
+            <a:lvl1pPr algn="ctr" defTabSz="914400" rtl="0" eaLnBrk="1" latinLnBrk="0" hangingPunct="1">
+              <a:lnSpc>
+                <a:spcPct val="90000"/>
+              </a:lnSpc>
+              <a:spcBef>
+                <a:spcPct val="0"/>
+              </a:spcBef>
+              <a:buNone/>
+              <a:defRPr sz="6000" kern="1200">
+                <a:solidFill>
+                  <a:schemeClr val="tx1"/>
+                </a:solidFill>
+                <a:latin typeface="+mj-lt"/>
+                <a:ea typeface="+mj-ea"/>
+                <a:cs typeface="+mj-cs"/>
+              </a:defRPr>
+            </a:lvl1pPr>
+          </a:lstStyle>
+          <a:p>
+            <a:r>
+              <a:rPr lang="en-US" dirty="0"/>
+              <a:t>Agentic Workflow </a:t>
+            </a:r>
+            <a:r>
+              <a:rPr lang="en-US" i="1" dirty="0"/>
+              <a:t>with Quarto</a:t>
             </a:r>
           </a:p>
         </p:txBody>
@@ -4432,7 +4659,7 @@
 </p:sld>
 </file>
 
-<file path=ppt/slides/slide3.xml><?xml version="1.0" encoding="utf-8"?>
+<file path=ppt/slides/slide4.xml><?xml version="1.0" encoding="utf-8"?>
 <p:sld xmlns:a="http://schemas.openxmlformats.org/drawingml/2006/main" xmlns:r="http://schemas.openxmlformats.org/officeDocument/2006/relationships" xmlns:p="http://schemas.openxmlformats.org/presentationml/2006/main">
   <p:cSld>
     <p:spTree>
@@ -4440,7 +4667,7 @@
         <p:cNvPr id="1" name="">
           <a:extLst>
             <a:ext uri="{FF2B5EF4-FFF2-40B4-BE49-F238E27FC236}">
-              <a16:creationId xmlns:a16="http://schemas.microsoft.com/office/drawing/2014/main" id="{763763BE-2111-4718-9900-949BD1EF9E46}"/>
+              <a16:creationId xmlns:a16="http://schemas.microsoft.com/office/drawing/2014/main" id="{6B220876-BE01-B05C-9BF5-38EEAD194F73}"/>
             </a:ext>
           </a:extLst>
         </p:cNvPr>
@@ -4460,7 +4687,7 @@
           <p:cNvPr id="4" name="Rounded Rectangle 3">
             <a:extLst>
               <a:ext uri="{FF2B5EF4-FFF2-40B4-BE49-F238E27FC236}">
-                <a16:creationId xmlns:a16="http://schemas.microsoft.com/office/drawing/2014/main" id="{3D2F870A-0A71-0E5E-F0FE-C66568060941}"/>
+                <a16:creationId xmlns:a16="http://schemas.microsoft.com/office/drawing/2014/main" id="{5CA7D2BB-88F2-1080-C1C2-BC6670F5A349}"/>
               </a:ext>
             </a:extLst>
           </p:cNvPr>
@@ -4469,7 +4696,7 @@
         </p:nvSpPr>
         <p:spPr>
           <a:xfrm>
-            <a:off x="776177" y="1815509"/>
+            <a:off x="776177" y="2804338"/>
             <a:ext cx="1169581" cy="927687"/>
           </a:xfrm>
           <a:prstGeom prst="roundRect">
@@ -4512,7 +4739,7 @@
           <p:cNvPr id="5" name="Rounded Rectangle 4">
             <a:extLst>
               <a:ext uri="{FF2B5EF4-FFF2-40B4-BE49-F238E27FC236}">
-                <a16:creationId xmlns:a16="http://schemas.microsoft.com/office/drawing/2014/main" id="{48CE930C-0A09-0CFF-108C-0DA31DFC50AD}"/>
+                <a16:creationId xmlns:a16="http://schemas.microsoft.com/office/drawing/2014/main" id="{9C3F8A28-F3C1-F496-E552-53F50AB57F20}"/>
               </a:ext>
             </a:extLst>
           </p:cNvPr>
@@ -4521,7 +4748,7 @@
         </p:nvSpPr>
         <p:spPr>
           <a:xfrm>
-            <a:off x="3437863" y="1815509"/>
+            <a:off x="3437863" y="2804338"/>
             <a:ext cx="1169581" cy="927687"/>
           </a:xfrm>
           <a:prstGeom prst="roundRect">
@@ -4564,7 +4791,7 @@
           <p:cNvPr id="6" name="Snip Diagonal Corner Rectangle 5">
             <a:extLst>
               <a:ext uri="{FF2B5EF4-FFF2-40B4-BE49-F238E27FC236}">
-                <a16:creationId xmlns:a16="http://schemas.microsoft.com/office/drawing/2014/main" id="{6B463AAF-B837-F6A1-8F30-97F63D3628DA}"/>
+                <a16:creationId xmlns:a16="http://schemas.microsoft.com/office/drawing/2014/main" id="{6C7EB6E6-C4D0-7432-BCF0-4B7AE0EB61C0}"/>
               </a:ext>
             </a:extLst>
           </p:cNvPr>
@@ -4573,7 +4800,7 @@
         </p:nvSpPr>
         <p:spPr>
           <a:xfrm>
-            <a:off x="6095999" y="1815510"/>
+            <a:off x="6095999" y="2804339"/>
             <a:ext cx="1792313" cy="927686"/>
           </a:xfrm>
           <a:prstGeom prst="snip2DiagRect">
@@ -4628,7 +4855,7 @@
           <p:cNvPr id="7" name="Rounded Rectangle 6">
             <a:extLst>
               <a:ext uri="{FF2B5EF4-FFF2-40B4-BE49-F238E27FC236}">
-                <a16:creationId xmlns:a16="http://schemas.microsoft.com/office/drawing/2014/main" id="{CE8F26AD-119F-CBCA-5047-6A502A370A4C}"/>
+                <a16:creationId xmlns:a16="http://schemas.microsoft.com/office/drawing/2014/main" id="{2062702C-6C47-5392-6F01-69D7ADDA8E01}"/>
               </a:ext>
             </a:extLst>
           </p:cNvPr>
@@ -4637,7 +4864,7 @@
         </p:nvSpPr>
         <p:spPr>
           <a:xfrm>
-            <a:off x="3437863" y="3644611"/>
+            <a:off x="3437863" y="4633440"/>
             <a:ext cx="1169581" cy="927688"/>
           </a:xfrm>
           <a:prstGeom prst="roundRect">
@@ -4675,7 +4902,7 @@
           <p:cNvPr id="9" name="Straight Arrow Connector 8">
             <a:extLst>
               <a:ext uri="{FF2B5EF4-FFF2-40B4-BE49-F238E27FC236}">
-                <a16:creationId xmlns:a16="http://schemas.microsoft.com/office/drawing/2014/main" id="{CED0D269-BCE0-D3C6-61A3-24B4F18EC018}"/>
+                <a16:creationId xmlns:a16="http://schemas.microsoft.com/office/drawing/2014/main" id="{AEABDD57-BF24-E6BE-840E-BFD1A2F3AD52}"/>
               </a:ext>
             </a:extLst>
           </p:cNvPr>
@@ -4688,7 +4915,7 @@
         </p:nvCxnSpPr>
         <p:spPr>
           <a:xfrm>
-            <a:off x="1945758" y="2279353"/>
+            <a:off x="1945758" y="3268182"/>
             <a:ext cx="1492105" cy="0"/>
           </a:xfrm>
           <a:prstGeom prst="straightConnector1">
@@ -4721,7 +4948,7 @@
           <p:cNvPr id="10" name="Straight Arrow Connector 9">
             <a:extLst>
               <a:ext uri="{FF2B5EF4-FFF2-40B4-BE49-F238E27FC236}">
-                <a16:creationId xmlns:a16="http://schemas.microsoft.com/office/drawing/2014/main" id="{F9B92DD7-E6AA-4B1A-C8AC-D0F028FCF981}"/>
+                <a16:creationId xmlns:a16="http://schemas.microsoft.com/office/drawing/2014/main" id="{C1235151-1E67-6C32-9D90-18990CAAB1A4}"/>
               </a:ext>
             </a:extLst>
           </p:cNvPr>
@@ -4734,7 +4961,7 @@
         </p:nvCxnSpPr>
         <p:spPr>
           <a:xfrm>
-            <a:off x="4607444" y="2279353"/>
+            <a:off x="4607444" y="3268182"/>
             <a:ext cx="1488555" cy="0"/>
           </a:xfrm>
           <a:prstGeom prst="straightConnector1">
@@ -4743,6 +4970,364 @@
           <a:ln>
             <a:solidFill>
               <a:schemeClr val="tx1"/>
+            </a:solidFill>
+            <a:tailEnd type="triangle" w="lg" len="lg"/>
+          </a:ln>
+        </p:spPr>
+        <p:style>
+          <a:lnRef idx="2">
+            <a:schemeClr val="accent1"/>
+          </a:lnRef>
+          <a:fillRef idx="0">
+            <a:schemeClr val="accent1"/>
+          </a:fillRef>
+          <a:effectRef idx="1">
+            <a:schemeClr val="accent1"/>
+          </a:effectRef>
+          <a:fontRef idx="minor">
+            <a:schemeClr val="tx1"/>
+          </a:fontRef>
+        </p:style>
+      </p:cxnSp>
+      <p:sp>
+        <p:nvSpPr>
+          <p:cNvPr id="21" name="TextBox 20">
+            <a:extLst>
+              <a:ext uri="{FF2B5EF4-FFF2-40B4-BE49-F238E27FC236}">
+                <a16:creationId xmlns:a16="http://schemas.microsoft.com/office/drawing/2014/main" id="{E5C780A8-981A-BAD9-7CFD-5554F6044DC8}"/>
+              </a:ext>
+            </a:extLst>
+          </p:cNvPr>
+          <p:cNvSpPr txBox="1"/>
+          <p:nvPr/>
+        </p:nvSpPr>
+        <p:spPr>
+          <a:xfrm>
+            <a:off x="2165597" y="2901656"/>
+            <a:ext cx="918265" cy="369332"/>
+          </a:xfrm>
+          <a:prstGeom prst="rect">
+            <a:avLst/>
+          </a:prstGeom>
+          <a:noFill/>
+        </p:spPr>
+        <p:txBody>
+          <a:bodyPr wrap="none" rtlCol="0" anchor="ctr">
+            <a:spAutoFit/>
+          </a:bodyPr>
+          <a:lstStyle/>
+          <a:p>
+            <a:pPr algn="ctr"/>
+            <a:r>
+              <a:rPr lang="en-US" dirty="0"/>
+              <a:t>Prompt</a:t>
+            </a:r>
+          </a:p>
+        </p:txBody>
+      </p:sp>
+      <p:sp>
+        <p:nvSpPr>
+          <p:cNvPr id="22" name="TextBox 21">
+            <a:extLst>
+              <a:ext uri="{FF2B5EF4-FFF2-40B4-BE49-F238E27FC236}">
+                <a16:creationId xmlns:a16="http://schemas.microsoft.com/office/drawing/2014/main" id="{A295F19E-AF57-E1D4-7DC6-141E549ABAA7}"/>
+              </a:ext>
+            </a:extLst>
+          </p:cNvPr>
+          <p:cNvSpPr txBox="1"/>
+          <p:nvPr/>
+        </p:nvSpPr>
+        <p:spPr>
+          <a:xfrm>
+            <a:off x="4649552" y="2895675"/>
+            <a:ext cx="1218154" cy="369332"/>
+          </a:xfrm>
+          <a:prstGeom prst="rect">
+            <a:avLst/>
+          </a:prstGeom>
+          <a:noFill/>
+        </p:spPr>
+        <p:txBody>
+          <a:bodyPr wrap="none" rtlCol="0" anchor="ctr">
+            <a:spAutoFit/>
+          </a:bodyPr>
+          <a:lstStyle/>
+          <a:p>
+            <a:pPr algn="ctr"/>
+            <a:r>
+              <a:rPr lang="en-US" dirty="0"/>
+              <a:t>Generates</a:t>
+            </a:r>
+          </a:p>
+        </p:txBody>
+      </p:sp>
+      <p:cxnSp>
+        <p:nvCxnSpPr>
+          <p:cNvPr id="2" name="Elbow Connector 1">
+            <a:extLst>
+              <a:ext uri="{FF2B5EF4-FFF2-40B4-BE49-F238E27FC236}">
+                <a16:creationId xmlns:a16="http://schemas.microsoft.com/office/drawing/2014/main" id="{3D30C9F1-0B1A-F40B-B60B-20313A7C42D9}"/>
+              </a:ext>
+            </a:extLst>
+          </p:cNvPr>
+          <p:cNvCxnSpPr>
+            <a:cxnSpLocks/>
+            <a:stCxn id="7" idx="3"/>
+            <a:endCxn id="6" idx="1"/>
+          </p:cNvCxnSpPr>
+          <p:nvPr/>
+        </p:nvCxnSpPr>
+        <p:spPr>
+          <a:xfrm flipV="1">
+            <a:off x="4607444" y="3732025"/>
+            <a:ext cx="2384712" cy="1365259"/>
+          </a:xfrm>
+          <a:prstGeom prst="bentConnector2">
+            <a:avLst/>
+          </a:prstGeom>
+          <a:ln>
+            <a:solidFill>
+              <a:schemeClr val="tx1"/>
+            </a:solidFill>
+            <a:tailEnd type="triangle" w="lg" len="lg"/>
+          </a:ln>
+        </p:spPr>
+        <p:style>
+          <a:lnRef idx="2">
+            <a:schemeClr val="accent1"/>
+          </a:lnRef>
+          <a:fillRef idx="0">
+            <a:schemeClr val="accent1"/>
+          </a:fillRef>
+          <a:effectRef idx="1">
+            <a:schemeClr val="accent1"/>
+          </a:effectRef>
+          <a:fontRef idx="minor">
+            <a:schemeClr val="tx1"/>
+          </a:fontRef>
+        </p:style>
+      </p:cxnSp>
+      <p:sp>
+        <p:nvSpPr>
+          <p:cNvPr id="3" name="Rounded Rectangle 2">
+            <a:extLst>
+              <a:ext uri="{FF2B5EF4-FFF2-40B4-BE49-F238E27FC236}">
+                <a16:creationId xmlns:a16="http://schemas.microsoft.com/office/drawing/2014/main" id="{6BF5D900-1850-BF61-8807-66E4C53DC28A}"/>
+              </a:ext>
+            </a:extLst>
+          </p:cNvPr>
+          <p:cNvSpPr/>
+          <p:nvPr/>
+        </p:nvSpPr>
+        <p:spPr>
+          <a:xfrm>
+            <a:off x="9076661" y="2810689"/>
+            <a:ext cx="1169581" cy="927687"/>
+          </a:xfrm>
+          <a:prstGeom prst="roundRect">
+            <a:avLst/>
+          </a:prstGeom>
+          <a:ln>
+            <a:solidFill>
+              <a:schemeClr val="tx1"/>
+            </a:solidFill>
+          </a:ln>
+        </p:spPr>
+        <p:style>
+          <a:lnRef idx="2">
+            <a:schemeClr val="accent6"/>
+          </a:lnRef>
+          <a:fillRef idx="1">
+            <a:schemeClr val="lt1"/>
+          </a:fillRef>
+          <a:effectRef idx="0">
+            <a:schemeClr val="accent6"/>
+          </a:effectRef>
+          <a:fontRef idx="minor">
+            <a:schemeClr val="dk1"/>
+          </a:fontRef>
+        </p:style>
+        <p:txBody>
+          <a:bodyPr rtlCol="0" anchor="ctr"/>
+          <a:lstStyle/>
+          <a:p>
+            <a:pPr algn="ctr"/>
+            <a:r>
+              <a:rPr lang="en-US" dirty="0"/>
+              <a:t>Artifact</a:t>
+            </a:r>
+          </a:p>
+        </p:txBody>
+      </p:sp>
+      <p:cxnSp>
+        <p:nvCxnSpPr>
+          <p:cNvPr id="18" name="Straight Arrow Connector 17">
+            <a:extLst>
+              <a:ext uri="{FF2B5EF4-FFF2-40B4-BE49-F238E27FC236}">
+                <a16:creationId xmlns:a16="http://schemas.microsoft.com/office/drawing/2014/main" id="{3CF1BAE7-E6C3-45FB-4B07-AACD872AC206}"/>
+              </a:ext>
+            </a:extLst>
+          </p:cNvPr>
+          <p:cNvCxnSpPr>
+            <a:cxnSpLocks/>
+            <a:stCxn id="6" idx="0"/>
+            <a:endCxn id="3" idx="1"/>
+          </p:cNvCxnSpPr>
+          <p:nvPr/>
+        </p:nvCxnSpPr>
+        <p:spPr>
+          <a:xfrm>
+            <a:off x="7888312" y="3268182"/>
+            <a:ext cx="1188349" cy="6351"/>
+          </a:xfrm>
+          <a:prstGeom prst="straightConnector1">
+            <a:avLst/>
+          </a:prstGeom>
+          <a:ln>
+            <a:solidFill>
+              <a:schemeClr val="tx1"/>
+            </a:solidFill>
+            <a:tailEnd type="triangle" w="lg" len="lg"/>
+          </a:ln>
+        </p:spPr>
+        <p:style>
+          <a:lnRef idx="2">
+            <a:schemeClr val="accent1"/>
+          </a:lnRef>
+          <a:fillRef idx="0">
+            <a:schemeClr val="accent1"/>
+          </a:fillRef>
+          <a:effectRef idx="1">
+            <a:schemeClr val="accent1"/>
+          </a:effectRef>
+          <a:fontRef idx="minor">
+            <a:schemeClr val="tx1"/>
+          </a:fontRef>
+        </p:style>
+      </p:cxnSp>
+      <p:sp>
+        <p:nvSpPr>
+          <p:cNvPr id="19" name="TextBox 18">
+            <a:extLst>
+              <a:ext uri="{FF2B5EF4-FFF2-40B4-BE49-F238E27FC236}">
+                <a16:creationId xmlns:a16="http://schemas.microsoft.com/office/drawing/2014/main" id="{0A64F78B-DFF4-F98B-AC71-2D68B1029C20}"/>
+              </a:ext>
+            </a:extLst>
+          </p:cNvPr>
+          <p:cNvSpPr txBox="1"/>
+          <p:nvPr/>
+        </p:nvSpPr>
+        <p:spPr>
+          <a:xfrm>
+            <a:off x="7976898" y="2895675"/>
+            <a:ext cx="1011175" cy="369332"/>
+          </a:xfrm>
+          <a:prstGeom prst="rect">
+            <a:avLst/>
+          </a:prstGeom>
+          <a:noFill/>
+        </p:spPr>
+        <p:txBody>
+          <a:bodyPr wrap="none" rtlCol="0" anchor="ctr">
+            <a:spAutoFit/>
+          </a:bodyPr>
+          <a:lstStyle/>
+          <a:p>
+            <a:pPr algn="ctr"/>
+            <a:r>
+              <a:rPr lang="en-US" dirty="0"/>
+              <a:t>Renders</a:t>
+            </a:r>
+          </a:p>
+        </p:txBody>
+      </p:sp>
+      <p:sp>
+        <p:nvSpPr>
+          <p:cNvPr id="8" name="Title 1">
+            <a:extLst>
+              <a:ext uri="{FF2B5EF4-FFF2-40B4-BE49-F238E27FC236}">
+                <a16:creationId xmlns:a16="http://schemas.microsoft.com/office/drawing/2014/main" id="{98AAEFB9-255B-3CF6-9B5D-D69A251750A9}"/>
+              </a:ext>
+            </a:extLst>
+          </p:cNvPr>
+          <p:cNvSpPr txBox="1">
+            <a:spLocks/>
+          </p:cNvSpPr>
+          <p:nvPr/>
+        </p:nvSpPr>
+        <p:spPr>
+          <a:xfrm>
+            <a:off x="838200" y="365125"/>
+            <a:ext cx="10515600" cy="1325563"/>
+          </a:xfrm>
+          <a:prstGeom prst="rect">
+            <a:avLst/>
+          </a:prstGeom>
+        </p:spPr>
+        <p:txBody>
+          <a:bodyPr vert="horz" lIns="91440" tIns="45720" rIns="91440" bIns="45720" rtlCol="0" anchor="b">
+            <a:normAutofit/>
+          </a:bodyPr>
+          <a:lstStyle>
+            <a:lvl1pPr algn="ctr" defTabSz="914400" rtl="0" eaLnBrk="1" latinLnBrk="0" hangingPunct="1">
+              <a:lnSpc>
+                <a:spcPct val="90000"/>
+              </a:lnSpc>
+              <a:spcBef>
+                <a:spcPct val="0"/>
+              </a:spcBef>
+              <a:buNone/>
+              <a:defRPr sz="6000" kern="1200">
+                <a:solidFill>
+                  <a:schemeClr val="tx1"/>
+                </a:solidFill>
+                <a:latin typeface="+mj-lt"/>
+                <a:ea typeface="+mj-ea"/>
+                <a:cs typeface="+mj-cs"/>
+              </a:defRPr>
+            </a:lvl1pPr>
+          </a:lstStyle>
+          <a:p>
+            <a:r>
+              <a:rPr lang="en-US" dirty="0"/>
+              <a:t>Agentic Workflow </a:t>
+            </a:r>
+            <a:r>
+              <a:rPr lang="en-US" i="1" dirty="0"/>
+              <a:t>with Quarto</a:t>
+            </a:r>
+          </a:p>
+        </p:txBody>
+      </p:sp>
+      <p:cxnSp>
+        <p:nvCxnSpPr>
+          <p:cNvPr id="11" name="Elbow Connector 10">
+            <a:extLst>
+              <a:ext uri="{FF2B5EF4-FFF2-40B4-BE49-F238E27FC236}">
+                <a16:creationId xmlns:a16="http://schemas.microsoft.com/office/drawing/2014/main" id="{D35B8D03-97E4-F4FA-F300-ED1D8017ED40}"/>
+              </a:ext>
+            </a:extLst>
+          </p:cNvPr>
+          <p:cNvCxnSpPr>
+            <a:cxnSpLocks/>
+            <a:stCxn id="4" idx="0"/>
+            <a:endCxn id="6" idx="3"/>
+          </p:cNvCxnSpPr>
+          <p:nvPr/>
+        </p:nvCxnSpPr>
+        <p:spPr>
+          <a:xfrm rot="16200000" flipH="1">
+            <a:off x="4176561" y="-11256"/>
+            <a:ext cx="1" cy="5631188"/>
+          </a:xfrm>
+          <a:prstGeom prst="bentConnector3">
+            <a:avLst>
+              <a:gd name="adj1" fmla="val -22860000000"/>
+            </a:avLst>
+          </a:prstGeom>
+          <a:ln>
+            <a:solidFill>
+              <a:schemeClr val="accent6"/>
             </a:solidFill>
             <a:tailEnd type="triangle" w="lg" len="lg"/>
           </a:ln>
@@ -4764,10 +5349,10 @@
       </p:cxnSp>
       <p:cxnSp>
         <p:nvCxnSpPr>
-          <p:cNvPr id="17" name="Elbow Connector 16">
-            <a:extLst>
-              <a:ext uri="{FF2B5EF4-FFF2-40B4-BE49-F238E27FC236}">
-                <a16:creationId xmlns:a16="http://schemas.microsoft.com/office/drawing/2014/main" id="{E78126B9-B8B8-03E0-77B2-ED57B62701BF}"/>
+          <p:cNvPr id="14" name="Elbow Connector 13">
+            <a:extLst>
+              <a:ext uri="{FF2B5EF4-FFF2-40B4-BE49-F238E27FC236}">
+                <a16:creationId xmlns:a16="http://schemas.microsoft.com/office/drawing/2014/main" id="{16917181-8851-9F0D-73AB-613DE860B1D2}"/>
               </a:ext>
             </a:extLst>
           </p:cNvPr>
@@ -4780,12 +5365,12 @@
         </p:nvCxnSpPr>
         <p:spPr>
           <a:xfrm rot="5400000" flipH="1">
-            <a:off x="5508034" y="-1403870"/>
+            <a:off x="5508034" y="-415041"/>
             <a:ext cx="6351" cy="8300484"/>
           </a:xfrm>
           <a:prstGeom prst="bentConnector3">
             <a:avLst>
-              <a:gd name="adj1" fmla="val -33399417"/>
+              <a:gd name="adj1" fmla="val -35408408"/>
             </a:avLst>
           </a:prstGeom>
           <a:ln>
@@ -4812,10 +5397,10 @@
       </p:cxnSp>
       <p:sp>
         <p:nvSpPr>
-          <p:cNvPr id="21" name="TextBox 20">
-            <a:extLst>
-              <a:ext uri="{FF2B5EF4-FFF2-40B4-BE49-F238E27FC236}">
-                <a16:creationId xmlns:a16="http://schemas.microsoft.com/office/drawing/2014/main" id="{37E15EA7-2F7B-340E-B22A-41AAD6D984A3}"/>
+          <p:cNvPr id="15" name="TextBox 14">
+            <a:extLst>
+              <a:ext uri="{FF2B5EF4-FFF2-40B4-BE49-F238E27FC236}">
+                <a16:creationId xmlns:a16="http://schemas.microsoft.com/office/drawing/2014/main" id="{A52F5471-2BBF-8F98-C29A-811B7B94A3E3}"/>
               </a:ext>
             </a:extLst>
           </p:cNvPr>
@@ -4824,80 +5409,8 @@
         </p:nvSpPr>
         <p:spPr>
           <a:xfrm>
-            <a:off x="2165597" y="1912827"/>
-            <a:ext cx="918265" cy="369332"/>
-          </a:xfrm>
-          <a:prstGeom prst="rect">
-            <a:avLst/>
-          </a:prstGeom>
-          <a:noFill/>
-        </p:spPr>
-        <p:txBody>
-          <a:bodyPr wrap="none" rtlCol="0" anchor="ctr">
-            <a:spAutoFit/>
-          </a:bodyPr>
-          <a:lstStyle/>
-          <a:p>
-            <a:pPr algn="ctr"/>
-            <a:r>
-              <a:rPr lang="en-US" dirty="0"/>
-              <a:t>Prompt</a:t>
-            </a:r>
-          </a:p>
-        </p:txBody>
-      </p:sp>
-      <p:sp>
-        <p:nvSpPr>
-          <p:cNvPr id="22" name="TextBox 21">
-            <a:extLst>
-              <a:ext uri="{FF2B5EF4-FFF2-40B4-BE49-F238E27FC236}">
-                <a16:creationId xmlns:a16="http://schemas.microsoft.com/office/drawing/2014/main" id="{5AFA6E2D-604A-72FC-ACE6-3F9372BA485C}"/>
-              </a:ext>
-            </a:extLst>
-          </p:cNvPr>
-          <p:cNvSpPr txBox="1"/>
-          <p:nvPr/>
-        </p:nvSpPr>
-        <p:spPr>
-          <a:xfrm>
-            <a:off x="4649552" y="1906846"/>
-            <a:ext cx="1218154" cy="369332"/>
-          </a:xfrm>
-          <a:prstGeom prst="rect">
-            <a:avLst/>
-          </a:prstGeom>
-          <a:noFill/>
-        </p:spPr>
-        <p:txBody>
-          <a:bodyPr wrap="none" rtlCol="0" anchor="ctr">
-            <a:spAutoFit/>
-          </a:bodyPr>
-          <a:lstStyle/>
-          <a:p>
-            <a:pPr algn="ctr"/>
-            <a:r>
-              <a:rPr lang="en-US" dirty="0"/>
-              <a:t>Generates</a:t>
-            </a:r>
-          </a:p>
-        </p:txBody>
-      </p:sp>
-      <p:sp>
-        <p:nvSpPr>
-          <p:cNvPr id="23" name="TextBox 22">
-            <a:extLst>
-              <a:ext uri="{FF2B5EF4-FFF2-40B4-BE49-F238E27FC236}">
-                <a16:creationId xmlns:a16="http://schemas.microsoft.com/office/drawing/2014/main" id="{28588679-BD62-3C3A-D08A-6F602436B717}"/>
-              </a:ext>
-            </a:extLst>
-          </p:cNvPr>
-          <p:cNvSpPr txBox="1"/>
-          <p:nvPr/>
-        </p:nvSpPr>
-        <p:spPr>
-          <a:xfrm>
-            <a:off x="3660227" y="4897329"/>
-            <a:ext cx="3392147" cy="369332"/>
+            <a:off x="4762971" y="5623015"/>
+            <a:ext cx="1654491" cy="369332"/>
           </a:xfrm>
           <a:prstGeom prst="rect">
             <a:avLst/>
@@ -4917,10 +5430,50 @@
                   <a:schemeClr val="accent6"/>
                 </a:solidFill>
               </a:rPr>
-              <a:t>Review artifact, update .</a:t>
-            </a:r>
-            <a:r>
-              <a:rPr lang="en-US" dirty="0" err="1">
+              <a:t>Review artifact</a:t>
+            </a:r>
+          </a:p>
+        </p:txBody>
+      </p:sp>
+      <p:sp>
+        <p:nvSpPr>
+          <p:cNvPr id="24" name="TextBox 23">
+            <a:extLst>
+              <a:ext uri="{FF2B5EF4-FFF2-40B4-BE49-F238E27FC236}">
+                <a16:creationId xmlns:a16="http://schemas.microsoft.com/office/drawing/2014/main" id="{8FA4E608-5434-CB1C-23C0-4CD77D8EAF37}"/>
+              </a:ext>
+            </a:extLst>
+          </p:cNvPr>
+          <p:cNvSpPr txBox="1"/>
+          <p:nvPr/>
+        </p:nvSpPr>
+        <p:spPr>
+          <a:xfrm>
+            <a:off x="1127675" y="2185475"/>
+            <a:ext cx="6097772" cy="369332"/>
+          </a:xfrm>
+          <a:prstGeom prst="rect">
+            <a:avLst/>
+          </a:prstGeom>
+          <a:noFill/>
+        </p:spPr>
+        <p:txBody>
+          <a:bodyPr wrap="square">
+            <a:spAutoFit/>
+          </a:bodyPr>
+          <a:lstStyle/>
+          <a:p>
+            <a:pPr algn="ctr"/>
+            <a:r>
+              <a:rPr lang="en-US" sz="1800" dirty="0">
+                <a:solidFill>
+                  <a:schemeClr val="accent6"/>
+                </a:solidFill>
+              </a:rPr>
+              <a:t>Update .</a:t>
+            </a:r>
+            <a:r>
+              <a:rPr lang="en-US" sz="1800" dirty="0" err="1">
                 <a:solidFill>
                   <a:schemeClr val="accent6"/>
                 </a:solidFill>
@@ -4928,166 +5481,58 @@
               <a:t>qmd</a:t>
             </a:r>
             <a:r>
-              <a:rPr lang="en-US" dirty="0">
+              <a:rPr lang="en-US" sz="1800" dirty="0">
                 <a:solidFill>
                   <a:schemeClr val="accent6"/>
                 </a:solidFill>
               </a:rPr>
-              <a:t> file</a:t>
-            </a:r>
-          </a:p>
-        </p:txBody>
-      </p:sp>
-      <p:cxnSp>
-        <p:nvCxnSpPr>
-          <p:cNvPr id="2" name="Elbow Connector 1">
-            <a:extLst>
-              <a:ext uri="{FF2B5EF4-FFF2-40B4-BE49-F238E27FC236}">
-                <a16:creationId xmlns:a16="http://schemas.microsoft.com/office/drawing/2014/main" id="{62FB0199-F93E-BCDD-AF5B-EAE57692124C}"/>
-              </a:ext>
-            </a:extLst>
-          </p:cNvPr>
-          <p:cNvCxnSpPr>
-            <a:cxnSpLocks/>
-            <a:stCxn id="7" idx="3"/>
-            <a:endCxn id="6" idx="1"/>
-          </p:cNvCxnSpPr>
-          <p:nvPr/>
-        </p:nvCxnSpPr>
-        <p:spPr>
-          <a:xfrm flipV="1">
-            <a:off x="4607444" y="2743196"/>
-            <a:ext cx="2384712" cy="1365259"/>
-          </a:xfrm>
-          <a:prstGeom prst="bentConnector2">
-            <a:avLst/>
-          </a:prstGeom>
-          <a:ln>
-            <a:solidFill>
-              <a:schemeClr val="tx1"/>
-            </a:solidFill>
-            <a:tailEnd type="triangle" w="lg" len="lg"/>
-          </a:ln>
-        </p:spPr>
-        <p:style>
-          <a:lnRef idx="2">
-            <a:schemeClr val="accent1"/>
-          </a:lnRef>
-          <a:fillRef idx="0">
-            <a:schemeClr val="accent1"/>
-          </a:fillRef>
-          <a:effectRef idx="1">
-            <a:schemeClr val="accent1"/>
-          </a:effectRef>
-          <a:fontRef idx="minor">
-            <a:schemeClr val="tx1"/>
-          </a:fontRef>
-        </p:style>
-      </p:cxnSp>
-      <p:sp>
-        <p:nvSpPr>
-          <p:cNvPr id="3" name="Rounded Rectangle 2">
-            <a:extLst>
-              <a:ext uri="{FF2B5EF4-FFF2-40B4-BE49-F238E27FC236}">
-                <a16:creationId xmlns:a16="http://schemas.microsoft.com/office/drawing/2014/main" id="{5F01C9AD-2C0E-40A9-4DFD-D24E704DB66A}"/>
-              </a:ext>
-            </a:extLst>
-          </p:cNvPr>
-          <p:cNvSpPr/>
-          <p:nvPr/>
-        </p:nvSpPr>
-        <p:spPr>
-          <a:xfrm>
-            <a:off x="9076661" y="1821860"/>
-            <a:ext cx="1169581" cy="927687"/>
-          </a:xfrm>
-          <a:prstGeom prst="roundRect">
-            <a:avLst/>
-          </a:prstGeom>
-          <a:ln>
-            <a:solidFill>
-              <a:schemeClr val="tx1"/>
-            </a:solidFill>
-          </a:ln>
-        </p:spPr>
-        <p:style>
-          <a:lnRef idx="2">
-            <a:schemeClr val="accent6"/>
-          </a:lnRef>
-          <a:fillRef idx="1">
-            <a:schemeClr val="lt1"/>
-          </a:fillRef>
-          <a:effectRef idx="0">
-            <a:schemeClr val="accent6"/>
-          </a:effectRef>
-          <a:fontRef idx="minor">
-            <a:schemeClr val="dk1"/>
-          </a:fontRef>
-        </p:style>
-        <p:txBody>
-          <a:bodyPr rtlCol="0" anchor="ctr"/>
-          <a:lstStyle/>
-          <a:p>
-            <a:pPr algn="ctr"/>
-            <a:r>
-              <a:rPr lang="en-US" dirty="0"/>
-              <a:t>Artifact</a:t>
-            </a:r>
-          </a:p>
-        </p:txBody>
-      </p:sp>
-      <p:cxnSp>
-        <p:nvCxnSpPr>
-          <p:cNvPr id="18" name="Straight Arrow Connector 17">
-            <a:extLst>
-              <a:ext uri="{FF2B5EF4-FFF2-40B4-BE49-F238E27FC236}">
-                <a16:creationId xmlns:a16="http://schemas.microsoft.com/office/drawing/2014/main" id="{C05312C7-0E5E-BB88-2705-959947232B62}"/>
-              </a:ext>
-            </a:extLst>
-          </p:cNvPr>
-          <p:cNvCxnSpPr>
-            <a:cxnSpLocks/>
-            <a:stCxn id="6" idx="0"/>
-            <a:endCxn id="3" idx="1"/>
-          </p:cNvCxnSpPr>
-          <p:nvPr/>
-        </p:nvCxnSpPr>
-        <p:spPr>
-          <a:xfrm>
-            <a:off x="7888312" y="2279353"/>
-            <a:ext cx="1188349" cy="6351"/>
-          </a:xfrm>
-          <a:prstGeom prst="straightConnector1">
-            <a:avLst/>
-          </a:prstGeom>
-          <a:ln>
-            <a:solidFill>
-              <a:schemeClr val="tx1"/>
-            </a:solidFill>
-            <a:tailEnd type="triangle" w="lg" len="lg"/>
-          </a:ln>
-        </p:spPr>
-        <p:style>
-          <a:lnRef idx="2">
-            <a:schemeClr val="accent1"/>
-          </a:lnRef>
-          <a:fillRef idx="0">
-            <a:schemeClr val="accent1"/>
-          </a:fillRef>
-          <a:effectRef idx="1">
-            <a:schemeClr val="accent1"/>
-          </a:effectRef>
-          <a:fontRef idx="minor">
-            <a:schemeClr val="tx1"/>
-          </a:fontRef>
-        </p:style>
-      </p:cxnSp>
-      <p:sp>
-        <p:nvSpPr>
-          <p:cNvPr id="19" name="TextBox 18">
-            <a:extLst>
-              <a:ext uri="{FF2B5EF4-FFF2-40B4-BE49-F238E27FC236}">
-                <a16:creationId xmlns:a16="http://schemas.microsoft.com/office/drawing/2014/main" id="{2CB5C0B7-598F-7ADD-C38E-0FB888E3D4DA}"/>
+              <a:t> file directly (skip agent)</a:t>
+            </a:r>
+          </a:p>
+        </p:txBody>
+      </p:sp>
+    </p:spTree>
+    <p:extLst>
+      <p:ext uri="{BB962C8B-B14F-4D97-AF65-F5344CB8AC3E}">
+        <p14:creationId xmlns:p14="http://schemas.microsoft.com/office/powerpoint/2010/main" val="439074722"/>
+      </p:ext>
+    </p:extLst>
+  </p:cSld>
+  <p:clrMapOvr>
+    <a:masterClrMapping/>
+  </p:clrMapOvr>
+</p:sld>
+</file>
+
+<file path=ppt/slides/slide5.xml><?xml version="1.0" encoding="utf-8"?>
+<p:sld xmlns:a="http://schemas.openxmlformats.org/drawingml/2006/main" xmlns:r="http://schemas.openxmlformats.org/officeDocument/2006/relationships" xmlns:p="http://schemas.openxmlformats.org/presentationml/2006/main">
+  <p:cSld>
+    <p:spTree>
+      <p:nvGrpSpPr>
+        <p:cNvPr id="1" name="">
+          <a:extLst>
+            <a:ext uri="{FF2B5EF4-FFF2-40B4-BE49-F238E27FC236}">
+              <a16:creationId xmlns:a16="http://schemas.microsoft.com/office/drawing/2014/main" id="{8D6BE48A-58C3-B4D8-EC29-066D982FFC27}"/>
+            </a:ext>
+          </a:extLst>
+        </p:cNvPr>
+        <p:cNvGrpSpPr/>
+        <p:nvPr/>
+      </p:nvGrpSpPr>
+      <p:grpSpPr>
+        <a:xfrm>
+          <a:off x="0" y="0"/>
+          <a:ext cx="0" cy="0"/>
+          <a:chOff x="0" y="0"/>
+          <a:chExt cx="0" cy="0"/>
+        </a:xfrm>
+      </p:grpSpPr>
+      <p:sp>
+        <p:nvSpPr>
+          <p:cNvPr id="8" name="TextBox 7">
+            <a:extLst>
+              <a:ext uri="{FF2B5EF4-FFF2-40B4-BE49-F238E27FC236}">
+                <a16:creationId xmlns:a16="http://schemas.microsoft.com/office/drawing/2014/main" id="{8BCCBC18-E581-A4A0-04BA-55E3DFBDE764}"/>
               </a:ext>
             </a:extLst>
           </p:cNvPr>
@@ -5096,8 +5541,8 @@
         </p:nvSpPr>
         <p:spPr>
           <a:xfrm>
-            <a:off x="7976898" y="1906846"/>
-            <a:ext cx="1011175" cy="369332"/>
+            <a:off x="2070689" y="1745143"/>
+            <a:ext cx="8561867" cy="3170099"/>
           </a:xfrm>
           <a:prstGeom prst="rect">
             <a:avLst/>
@@ -5105,71 +5550,503 @@
           <a:noFill/>
         </p:spPr>
         <p:txBody>
-          <a:bodyPr wrap="none" rtlCol="0" anchor="ctr">
+          <a:bodyPr wrap="square">
             <a:spAutoFit/>
           </a:bodyPr>
           <a:lstStyle/>
           <a:p>
-            <a:pPr algn="ctr"/>
-            <a:r>
-              <a:rPr lang="en-US" dirty="0"/>
-              <a:t>Renders</a:t>
-            </a:r>
-          </a:p>
-        </p:txBody>
-      </p:sp>
-      <p:cxnSp>
-        <p:nvCxnSpPr>
-          <p:cNvPr id="8" name="Elbow Connector 7">
-            <a:extLst>
-              <a:ext uri="{FF2B5EF4-FFF2-40B4-BE49-F238E27FC236}">
-                <a16:creationId xmlns:a16="http://schemas.microsoft.com/office/drawing/2014/main" id="{C7B525B6-D191-5EE9-3D2E-967E54A6E34E}"/>
-              </a:ext>
-            </a:extLst>
-          </p:cNvPr>
-          <p:cNvCxnSpPr>
-            <a:cxnSpLocks/>
-            <a:stCxn id="4" idx="0"/>
-            <a:endCxn id="6" idx="3"/>
-          </p:cNvCxnSpPr>
-          <p:nvPr/>
-        </p:nvCxnSpPr>
-        <p:spPr>
-          <a:xfrm rot="16200000" flipH="1">
-            <a:off x="4176561" y="-1000085"/>
-            <a:ext cx="1" cy="5631188"/>
-          </a:xfrm>
-          <a:prstGeom prst="bentConnector3">
-            <a:avLst>
-              <a:gd name="adj1" fmla="val -22860000000"/>
-            </a:avLst>
-          </a:prstGeom>
-          <a:ln>
-            <a:solidFill>
-              <a:schemeClr val="accent6"/>
-            </a:solidFill>
-            <a:tailEnd type="triangle" w="lg" len="lg"/>
-          </a:ln>
-        </p:spPr>
-        <p:style>
-          <a:lnRef idx="2">
-            <a:schemeClr val="accent1"/>
-          </a:lnRef>
-          <a:fillRef idx="0">
-            <a:schemeClr val="accent1"/>
-          </a:fillRef>
-          <a:effectRef idx="1">
-            <a:schemeClr val="accent1"/>
-          </a:effectRef>
-          <a:fontRef idx="minor">
-            <a:schemeClr val="tx1"/>
-          </a:fontRef>
-        </p:style>
-      </p:cxnSp>
+            <a:r>
+              <a:rPr lang="en-US" sz="4000" dirty="0"/>
+              <a:t>Agents with Quarto buy you 3 things:</a:t>
+            </a:r>
+          </a:p>
+          <a:p>
+            <a:endParaRPr lang="en-US" sz="4000" dirty="0"/>
+          </a:p>
+          <a:p>
+            <a:pPr marL="285750" indent="-285750">
+              <a:buFont typeface="Arial" panose="020B0604020202020204" pitchFamily="34" charset="0"/>
+              <a:buChar char="•"/>
+            </a:pPr>
+            <a:r>
+              <a:rPr lang="en-US" sz="4000" dirty="0"/>
+              <a:t>Correctness</a:t>
+            </a:r>
+          </a:p>
+          <a:p>
+            <a:pPr marL="285750" indent="-285750">
+              <a:buFont typeface="Arial" panose="020B0604020202020204" pitchFamily="34" charset="0"/>
+              <a:buChar char="•"/>
+            </a:pPr>
+            <a:r>
+              <a:rPr lang="en-US" sz="4000" dirty="0"/>
+              <a:t>Efficiency</a:t>
+            </a:r>
+          </a:p>
+          <a:p>
+            <a:pPr marL="285750" indent="-285750">
+              <a:buFont typeface="Arial" panose="020B0604020202020204" pitchFamily="34" charset="0"/>
+              <a:buChar char="•"/>
+            </a:pPr>
+            <a:r>
+              <a:rPr lang="en-US" sz="4000" dirty="0"/>
+              <a:t>Trust</a:t>
+            </a:r>
+          </a:p>
+        </p:txBody>
+      </p:sp>
     </p:spTree>
     <p:extLst>
       <p:ext uri="{BB962C8B-B14F-4D97-AF65-F5344CB8AC3E}">
-        <p14:creationId xmlns:p14="http://schemas.microsoft.com/office/powerpoint/2010/main" val="1415108244"/>
+        <p14:creationId xmlns:p14="http://schemas.microsoft.com/office/powerpoint/2010/main" val="118762455"/>
+      </p:ext>
+    </p:extLst>
+  </p:cSld>
+  <p:clrMapOvr>
+    <a:masterClrMapping/>
+  </p:clrMapOvr>
+</p:sld>
+</file>
+
+<file path=ppt/slides/slide6.xml><?xml version="1.0" encoding="utf-8"?>
+<p:sld xmlns:a="http://schemas.openxmlformats.org/drawingml/2006/main" xmlns:r="http://schemas.openxmlformats.org/officeDocument/2006/relationships" xmlns:p="http://schemas.openxmlformats.org/presentationml/2006/main">
+  <p:cSld>
+    <p:spTree>
+      <p:nvGrpSpPr>
+        <p:cNvPr id="1" name="">
+          <a:extLst>
+            <a:ext uri="{FF2B5EF4-FFF2-40B4-BE49-F238E27FC236}">
+              <a16:creationId xmlns:a16="http://schemas.microsoft.com/office/drawing/2014/main" id="{C88D3D91-D0C0-67B3-EAA5-6C1B16A8F300}"/>
+            </a:ext>
+          </a:extLst>
+        </p:cNvPr>
+        <p:cNvGrpSpPr/>
+        <p:nvPr/>
+      </p:nvGrpSpPr>
+      <p:grpSpPr>
+        <a:xfrm>
+          <a:off x="0" y="0"/>
+          <a:ext cx="0" cy="0"/>
+          <a:chOff x="0" y="0"/>
+          <a:chExt cx="0" cy="0"/>
+        </a:xfrm>
+      </p:grpSpPr>
+      <p:sp>
+        <p:nvSpPr>
+          <p:cNvPr id="8" name="TextBox 7">
+            <a:extLst>
+              <a:ext uri="{FF2B5EF4-FFF2-40B4-BE49-F238E27FC236}">
+                <a16:creationId xmlns:a16="http://schemas.microsoft.com/office/drawing/2014/main" id="{6177956E-3826-72AE-3514-226466DE42EC}"/>
+              </a:ext>
+            </a:extLst>
+          </p:cNvPr>
+          <p:cNvSpPr txBox="1"/>
+          <p:nvPr/>
+        </p:nvSpPr>
+        <p:spPr>
+          <a:xfrm>
+            <a:off x="539600" y="437338"/>
+            <a:ext cx="8561867" cy="1323439"/>
+          </a:xfrm>
+          <a:prstGeom prst="rect">
+            <a:avLst/>
+          </a:prstGeom>
+          <a:noFill/>
+        </p:spPr>
+        <p:txBody>
+          <a:bodyPr wrap="square">
+            <a:spAutoFit/>
+          </a:bodyPr>
+          <a:lstStyle/>
+          <a:p>
+            <a:r>
+              <a:rPr lang="en-US" sz="4000" b="1" dirty="0"/>
+              <a:t>Correctness</a:t>
+            </a:r>
+          </a:p>
+          <a:p>
+            <a:endParaRPr lang="en-US" sz="4000" dirty="0"/>
+          </a:p>
+        </p:txBody>
+      </p:sp>
+      <p:sp>
+        <p:nvSpPr>
+          <p:cNvPr id="3" name="TextBox 2">
+            <a:extLst>
+              <a:ext uri="{FF2B5EF4-FFF2-40B4-BE49-F238E27FC236}">
+                <a16:creationId xmlns:a16="http://schemas.microsoft.com/office/drawing/2014/main" id="{69A1D472-D336-E0D8-9BE3-C76D66DFC1C2}"/>
+              </a:ext>
+            </a:extLst>
+          </p:cNvPr>
+          <p:cNvSpPr txBox="1"/>
+          <p:nvPr/>
+        </p:nvSpPr>
+        <p:spPr>
+          <a:xfrm>
+            <a:off x="1698549" y="2137167"/>
+            <a:ext cx="8200361" cy="2246769"/>
+          </a:xfrm>
+          <a:prstGeom prst="rect">
+            <a:avLst/>
+          </a:prstGeom>
+          <a:noFill/>
+        </p:spPr>
+        <p:txBody>
+          <a:bodyPr wrap="square">
+            <a:spAutoFit/>
+          </a:bodyPr>
+          <a:lstStyle/>
+          <a:p>
+            <a:r>
+              <a:rPr lang="en-US" sz="2800" b="1" dirty="0"/>
+              <a:t>Without Quarto</a:t>
+            </a:r>
+            <a:r>
+              <a:rPr lang="en-US" sz="2800" dirty="0"/>
+              <a:t>: Agent writes </a:t>
+            </a:r>
+            <a:r>
+              <a:rPr lang="en-US" sz="2800" i="1" dirty="0"/>
+              <a:t>probabilistic </a:t>
+            </a:r>
+            <a:r>
+              <a:rPr lang="en-US" sz="2800" dirty="0"/>
+              <a:t>output; numbers might be wrong</a:t>
+            </a:r>
+          </a:p>
+          <a:p>
+            <a:endParaRPr lang="en-US" sz="2800" dirty="0"/>
+          </a:p>
+          <a:p>
+            <a:r>
+              <a:rPr lang="en-US" sz="2800" b="1" dirty="0"/>
+              <a:t>With Quarto</a:t>
+            </a:r>
+            <a:r>
+              <a:rPr lang="en-US" sz="2800" dirty="0"/>
+              <a:t>: Agent writes </a:t>
+            </a:r>
+            <a:r>
+              <a:rPr lang="en-US" sz="2800" i="1" dirty="0"/>
+              <a:t>structure</a:t>
+            </a:r>
+            <a:r>
+              <a:rPr lang="en-US" sz="2800" dirty="0"/>
+              <a:t> and </a:t>
+            </a:r>
+            <a:r>
+              <a:rPr lang="en-US" sz="2800" i="1" dirty="0"/>
+              <a:t>code</a:t>
+            </a:r>
+            <a:r>
+              <a:rPr lang="en-US" sz="2800" dirty="0"/>
+              <a:t>; data flows through code, numbers are </a:t>
+            </a:r>
+            <a:r>
+              <a:rPr lang="en-US" sz="2800" i="1" dirty="0"/>
+              <a:t>computed</a:t>
+            </a:r>
+            <a:r>
+              <a:rPr lang="en-US" sz="2800" dirty="0"/>
+              <a:t>.</a:t>
+            </a:r>
+          </a:p>
+        </p:txBody>
+      </p:sp>
+    </p:spTree>
+    <p:extLst>
+      <p:ext uri="{BB962C8B-B14F-4D97-AF65-F5344CB8AC3E}">
+        <p14:creationId xmlns:p14="http://schemas.microsoft.com/office/powerpoint/2010/main" val="2967962347"/>
+      </p:ext>
+    </p:extLst>
+  </p:cSld>
+  <p:clrMapOvr>
+    <a:masterClrMapping/>
+  </p:clrMapOvr>
+</p:sld>
+</file>
+
+<file path=ppt/slides/slide7.xml><?xml version="1.0" encoding="utf-8"?>
+<p:sld xmlns:a="http://schemas.openxmlformats.org/drawingml/2006/main" xmlns:r="http://schemas.openxmlformats.org/officeDocument/2006/relationships" xmlns:p="http://schemas.openxmlformats.org/presentationml/2006/main">
+  <p:cSld>
+    <p:spTree>
+      <p:nvGrpSpPr>
+        <p:cNvPr id="1" name="">
+          <a:extLst>
+            <a:ext uri="{FF2B5EF4-FFF2-40B4-BE49-F238E27FC236}">
+              <a16:creationId xmlns:a16="http://schemas.microsoft.com/office/drawing/2014/main" id="{035073B8-D069-62C3-319D-BACD9F17B363}"/>
+            </a:ext>
+          </a:extLst>
+        </p:cNvPr>
+        <p:cNvGrpSpPr/>
+        <p:nvPr/>
+      </p:nvGrpSpPr>
+      <p:grpSpPr>
+        <a:xfrm>
+          <a:off x="0" y="0"/>
+          <a:ext cx="0" cy="0"/>
+          <a:chOff x="0" y="0"/>
+          <a:chExt cx="0" cy="0"/>
+        </a:xfrm>
+      </p:grpSpPr>
+      <p:sp>
+        <p:nvSpPr>
+          <p:cNvPr id="8" name="TextBox 7">
+            <a:extLst>
+              <a:ext uri="{FF2B5EF4-FFF2-40B4-BE49-F238E27FC236}">
+                <a16:creationId xmlns:a16="http://schemas.microsoft.com/office/drawing/2014/main" id="{3F79BEB1-D573-3F11-22E2-88F35A996346}"/>
+              </a:ext>
+            </a:extLst>
+          </p:cNvPr>
+          <p:cNvSpPr txBox="1"/>
+          <p:nvPr/>
+        </p:nvSpPr>
+        <p:spPr>
+          <a:xfrm>
+            <a:off x="390744" y="138889"/>
+            <a:ext cx="8561867" cy="2554545"/>
+          </a:xfrm>
+          <a:prstGeom prst="rect">
+            <a:avLst/>
+          </a:prstGeom>
+          <a:noFill/>
+        </p:spPr>
+        <p:txBody>
+          <a:bodyPr wrap="square">
+            <a:spAutoFit/>
+          </a:bodyPr>
+          <a:lstStyle/>
+          <a:p>
+            <a:r>
+              <a:rPr lang="en-US" sz="4000" b="1" dirty="0"/>
+              <a:t>Efficiency</a:t>
+            </a:r>
+          </a:p>
+          <a:p>
+            <a:r>
+              <a:rPr lang="en-US" sz="4000" dirty="0"/>
+              <a:t>With Quarto, agentic generates markdown, and format is </a:t>
+            </a:r>
+            <a:r>
+              <a:rPr lang="en-US" sz="4000" i="1" dirty="0"/>
+              <a:t>rendered</a:t>
+            </a:r>
+          </a:p>
+          <a:p>
+            <a:endParaRPr lang="en-US" sz="4000" dirty="0"/>
+          </a:p>
+        </p:txBody>
+      </p:sp>
+      <p:pic>
+        <p:nvPicPr>
+          <p:cNvPr id="2" name="Picture 1" descr="Dumbbell plot with four output types on the y-axis. Blue dots on the left show Quarto token counts; coral dots on the right show direct format token counts, connected by a grey line.">
+            <a:extLst>
+              <a:ext uri="{FF2B5EF4-FFF2-40B4-BE49-F238E27FC236}">
+                <a16:creationId xmlns:a16="http://schemas.microsoft.com/office/drawing/2014/main" id="{90836A7E-E9B8-5D2A-BD6C-FD519AE81E11}"/>
+              </a:ext>
+            </a:extLst>
+          </p:cNvPr>
+          <p:cNvPicPr>
+            <a:picLocks noChangeAspect="1"/>
+          </p:cNvPicPr>
+          <p:nvPr/>
+        </p:nvPicPr>
+        <p:blipFill>
+          <a:blip r:embed="rId2"/>
+          <a:stretch>
+            <a:fillRect/>
+          </a:stretch>
+        </p:blipFill>
+        <p:spPr>
+          <a:xfrm>
+            <a:off x="1726017" y="2349128"/>
+            <a:ext cx="8739966" cy="4369983"/>
+          </a:xfrm>
+          <a:prstGeom prst="rect">
+            <a:avLst/>
+          </a:prstGeom>
+        </p:spPr>
+      </p:pic>
+    </p:spTree>
+    <p:extLst>
+      <p:ext uri="{BB962C8B-B14F-4D97-AF65-F5344CB8AC3E}">
+        <p14:creationId xmlns:p14="http://schemas.microsoft.com/office/powerpoint/2010/main" val="2593912501"/>
+      </p:ext>
+    </p:extLst>
+  </p:cSld>
+  <p:clrMapOvr>
+    <a:masterClrMapping/>
+  </p:clrMapOvr>
+</p:sld>
+</file>
+
+<file path=ppt/slides/slide8.xml><?xml version="1.0" encoding="utf-8"?>
+<p:sld xmlns:a="http://schemas.openxmlformats.org/drawingml/2006/main" xmlns:r="http://schemas.openxmlformats.org/officeDocument/2006/relationships" xmlns:p="http://schemas.openxmlformats.org/presentationml/2006/main">
+  <p:cSld>
+    <p:spTree>
+      <p:nvGrpSpPr>
+        <p:cNvPr id="1" name="">
+          <a:extLst>
+            <a:ext uri="{FF2B5EF4-FFF2-40B4-BE49-F238E27FC236}">
+              <a16:creationId xmlns:a16="http://schemas.microsoft.com/office/drawing/2014/main" id="{984DDDAD-C950-7B82-0DD0-17FC58ED3CBA}"/>
+            </a:ext>
+          </a:extLst>
+        </p:cNvPr>
+        <p:cNvGrpSpPr/>
+        <p:nvPr/>
+      </p:nvGrpSpPr>
+      <p:grpSpPr>
+        <a:xfrm>
+          <a:off x="0" y="0"/>
+          <a:ext cx="0" cy="0"/>
+          <a:chOff x="0" y="0"/>
+          <a:chExt cx="0" cy="0"/>
+        </a:xfrm>
+      </p:grpSpPr>
+      <p:sp>
+        <p:nvSpPr>
+          <p:cNvPr id="8" name="TextBox 7">
+            <a:extLst>
+              <a:ext uri="{FF2B5EF4-FFF2-40B4-BE49-F238E27FC236}">
+                <a16:creationId xmlns:a16="http://schemas.microsoft.com/office/drawing/2014/main" id="{01A03A5D-7236-706A-81DB-F2E146B3E844}"/>
+              </a:ext>
+            </a:extLst>
+          </p:cNvPr>
+          <p:cNvSpPr txBox="1"/>
+          <p:nvPr/>
+        </p:nvSpPr>
+        <p:spPr>
+          <a:xfrm>
+            <a:off x="539600" y="437338"/>
+            <a:ext cx="8561867" cy="1323439"/>
+          </a:xfrm>
+          <a:prstGeom prst="rect">
+            <a:avLst/>
+          </a:prstGeom>
+          <a:noFill/>
+        </p:spPr>
+        <p:txBody>
+          <a:bodyPr wrap="square">
+            <a:spAutoFit/>
+          </a:bodyPr>
+          <a:lstStyle/>
+          <a:p>
+            <a:r>
+              <a:rPr lang="en-US" sz="4000" b="1" dirty="0"/>
+              <a:t>Trust</a:t>
+            </a:r>
+          </a:p>
+          <a:p>
+            <a:endParaRPr lang="en-US" sz="4000" dirty="0"/>
+          </a:p>
+        </p:txBody>
+      </p:sp>
+      <p:sp>
+        <p:nvSpPr>
+          <p:cNvPr id="3" name="TextBox 2">
+            <a:extLst>
+              <a:ext uri="{FF2B5EF4-FFF2-40B4-BE49-F238E27FC236}">
+                <a16:creationId xmlns:a16="http://schemas.microsoft.com/office/drawing/2014/main" id="{62232ED4-EB2F-03DE-BB0B-85596D84D8EE}"/>
+              </a:ext>
+            </a:extLst>
+          </p:cNvPr>
+          <p:cNvSpPr txBox="1"/>
+          <p:nvPr/>
+        </p:nvSpPr>
+        <p:spPr>
+          <a:xfrm>
+            <a:off x="1698549" y="2137167"/>
+            <a:ext cx="8476809" cy="2246769"/>
+          </a:xfrm>
+          <a:prstGeom prst="rect">
+            <a:avLst/>
+          </a:prstGeom>
+          <a:noFill/>
+        </p:spPr>
+        <p:txBody>
+          <a:bodyPr wrap="square">
+            <a:spAutoFit/>
+          </a:bodyPr>
+          <a:lstStyle/>
+          <a:p>
+            <a:r>
+              <a:rPr lang="en-US" sz="2800" b="1" dirty="0"/>
+              <a:t>Checkable by machine:</a:t>
+            </a:r>
+            <a:r>
+              <a:rPr lang="en-US" sz="2800" dirty="0"/>
+              <a:t> </a:t>
+            </a:r>
+            <a:r>
+              <a:rPr lang="en-US" sz="2400" dirty="0">
+                <a:latin typeface="Monaco" pitchFamily="2" charset="77"/>
+              </a:rPr>
+              <a:t>quarto render</a:t>
+            </a:r>
+            <a:r>
+              <a:rPr lang="en-US" sz="2800" dirty="0"/>
+              <a:t> fails </a:t>
+            </a:r>
+            <a:r>
+              <a:rPr lang="en-US" sz="2800" i="1" dirty="0"/>
+              <a:t>loudly</a:t>
+            </a:r>
+            <a:r>
+              <a:rPr lang="en-US" sz="2800" dirty="0"/>
+              <a:t>; (broken references, bad </a:t>
+            </a:r>
+            <a:r>
+              <a:rPr lang="en-US" sz="2800" dirty="0" err="1"/>
+              <a:t>yaml</a:t>
+            </a:r>
+            <a:r>
+              <a:rPr lang="en-US" sz="2800" dirty="0"/>
+              <a:t>, </a:t>
+            </a:r>
+            <a:r>
+              <a:rPr lang="en-US" sz="2800" dirty="0" err="1"/>
+              <a:t>etc</a:t>
+            </a:r>
+            <a:r>
+              <a:rPr lang="en-US" sz="2800" dirty="0"/>
+              <a:t>)</a:t>
+            </a:r>
+          </a:p>
+          <a:p>
+            <a:endParaRPr lang="en-US" sz="2800" dirty="0"/>
+          </a:p>
+          <a:p>
+            <a:r>
+              <a:rPr lang="en-US" sz="2800" b="1" dirty="0"/>
+              <a:t>Checkable by human</a:t>
+            </a:r>
+            <a:r>
+              <a:rPr lang="en-US" sz="2800" dirty="0"/>
+              <a:t>: plain-text .</a:t>
+            </a:r>
+            <a:r>
+              <a:rPr lang="en-US" sz="2800" dirty="0" err="1"/>
+              <a:t>qmd</a:t>
+            </a:r>
+            <a:r>
+              <a:rPr lang="en-US" sz="2800" dirty="0"/>
+              <a:t> source means the agent's edit is a </a:t>
+            </a:r>
+            <a:r>
+              <a:rPr lang="en-US" sz="2800" i="1" dirty="0"/>
+              <a:t>diff</a:t>
+            </a:r>
+            <a:r>
+              <a:rPr lang="en-US" sz="2800" dirty="0"/>
+              <a:t>.</a:t>
+            </a:r>
+          </a:p>
+        </p:txBody>
+      </p:sp>
+    </p:spTree>
+    <p:extLst>
+      <p:ext uri="{BB962C8B-B14F-4D97-AF65-F5344CB8AC3E}">
+        <p14:creationId xmlns:p14="http://schemas.microsoft.com/office/powerpoint/2010/main" val="2346450093"/>
       </p:ext>
     </p:extLst>
   </p:cSld>
